--- a/presentation/Zonation_Final_Presentation.pptx
+++ b/presentation/Zonation_Final_Presentation.pptx
@@ -15,11 +15,11 @@
     <p:sldId id="260" r:id="rId6"/>
     <p:sldId id="261" r:id="rId7"/>
     <p:sldId id="262" r:id="rId8"/>
-    <p:sldId id="263" r:id="rId9"/>
+    <p:sldId id="274" r:id="rId9"/>
     <p:sldId id="264" r:id="rId10"/>
     <p:sldId id="265" r:id="rId11"/>
     <p:sldId id="266" r:id="rId12"/>
-    <p:sldId id="267" r:id="rId13"/>
+    <p:sldId id="275" r:id="rId13"/>
     <p:sldId id="268" r:id="rId14"/>
     <p:sldId id="269" r:id="rId15"/>
     <p:sldId id="270" r:id="rId16"/>
@@ -403,7 +403,7 @@
           <a:p>
             <a:fld id="{F7021451-1387-4CA6-816F-3879F97B5CBC}" type="slidenum">
               <a:rPr lang="en-US"/>
-              <a:t>10</a:t>
+              <a:t>11</a:t>
             </a:fld>
             <a:endParaRPr lang="en-US"/>
           </a:p>
@@ -487,7 +487,7 @@
           <a:p>
             <a:fld id="{F7021451-1387-4CA6-816F-3879F97B5CBC}" type="slidenum">
               <a:rPr lang="en-US"/>
-              <a:t>11</a:t>
+              <a:t>13</a:t>
             </a:fld>
             <a:endParaRPr lang="en-US"/>
           </a:p>
@@ -571,7 +571,7 @@
           <a:p>
             <a:fld id="{F7021451-1387-4CA6-816F-3879F97B5CBC}" type="slidenum">
               <a:rPr lang="en-US"/>
-              <a:t>12</a:t>
+              <a:t>14</a:t>
             </a:fld>
             <a:endParaRPr lang="en-US"/>
           </a:p>
@@ -655,7 +655,7 @@
           <a:p>
             <a:fld id="{F7021451-1387-4CA6-816F-3879F97B5CBC}" type="slidenum">
               <a:rPr lang="en-US"/>
-              <a:t>13</a:t>
+              <a:t>15</a:t>
             </a:fld>
             <a:endParaRPr lang="en-US"/>
           </a:p>
@@ -739,7 +739,7 @@
           <a:p>
             <a:fld id="{F7021451-1387-4CA6-816F-3879F97B5CBC}" type="slidenum">
               <a:rPr lang="en-US"/>
-              <a:t>14</a:t>
+              <a:t>16</a:t>
             </a:fld>
             <a:endParaRPr lang="en-US"/>
           </a:p>
@@ -823,7 +823,7 @@
           <a:p>
             <a:fld id="{F7021451-1387-4CA6-816F-3879F97B5CBC}" type="slidenum">
               <a:rPr lang="en-US"/>
-              <a:t>15</a:t>
+              <a:t>17</a:t>
             </a:fld>
             <a:endParaRPr lang="en-US"/>
           </a:p>
@@ -907,174 +907,6 @@
           <a:p>
             <a:fld id="{F7021451-1387-4CA6-816F-3879F97B5CBC}" type="slidenum">
               <a:rPr lang="en-US"/>
-              <a:t>16</a:t>
-            </a:fld>
-            <a:endParaRPr lang="en-US"/>
-          </a:p>
-        </p:txBody>
-      </p:sp>
-    </p:spTree>
-    <p:extLst>
-      <p:ext uri="{BB962C8B-B14F-4D97-AF65-F5344CB8AC3E}">
-        <p14:creationId xmlns:p14="http://schemas.microsoft.com/office/powerpoint/2010/main" val="1024086991"/>
-      </p:ext>
-    </p:extLst>
-  </p:cSld>
-  <p:clrMapOvr>
-    <a:masterClrMapping/>
-  </p:clrMapOvr>
-</p:notes>
-</file>
-
-<file path=ppt/notesSlides/notesSlide17.xml><?xml version="1.0" encoding="utf-8"?>
-<p:notes xmlns:a="http://schemas.openxmlformats.org/drawingml/2006/main" xmlns:r="http://schemas.openxmlformats.org/officeDocument/2006/relationships" xmlns:p="http://schemas.openxmlformats.org/presentationml/2006/main">
-  <p:cSld>
-    <p:spTree>
-      <p:nvGrpSpPr>
-        <p:cNvPr id="1" name=""/>
-        <p:cNvGrpSpPr/>
-        <p:nvPr/>
-      </p:nvGrpSpPr>
-      <p:grpSpPr>
-        <a:xfrm>
-          <a:off x="0" y="0"/>
-          <a:ext cx="0" cy="0"/>
-          <a:chOff x="0" y="0"/>
-          <a:chExt cx="0" cy="0"/>
-        </a:xfrm>
-      </p:grpSpPr>
-      <p:sp>
-        <p:nvSpPr>
-          <p:cNvPr id="2" name="Slide Image Placeholder 1"/>
-          <p:cNvSpPr>
-            <a:spLocks noGrp="1" noRot="1" noChangeAspect="1"/>
-          </p:cNvSpPr>
-          <p:nvPr>
-            <p:ph type="sldImg"/>
-          </p:nvPr>
-        </p:nvSpPr>
-        <p:spPr/>
-      </p:sp>
-      <p:sp>
-        <p:nvSpPr>
-          <p:cNvPr id="3" name="Notes Placeholder 2"/>
-          <p:cNvSpPr>
-            <a:spLocks noGrp="1"/>
-          </p:cNvSpPr>
-          <p:nvPr>
-            <p:ph type="body" idx="1"/>
-          </p:nvPr>
-        </p:nvSpPr>
-        <p:spPr/>
-        <p:txBody>
-          <a:bodyPr/>
-          <a:lstStyle/>
-          <a:p>
-            <a:endParaRPr lang="en-US" dirty="0"/>
-          </a:p>
-        </p:txBody>
-      </p:sp>
-      <p:sp>
-        <p:nvSpPr>
-          <p:cNvPr id="4" name="Slide Number Placeholder 3"/>
-          <p:cNvSpPr>
-            <a:spLocks noGrp="1"/>
-          </p:cNvSpPr>
-          <p:nvPr>
-            <p:ph type="sldNum" sz="quarter" idx="10"/>
-          </p:nvPr>
-        </p:nvSpPr>
-        <p:spPr/>
-        <p:txBody>
-          <a:bodyPr/>
-          <a:lstStyle/>
-          <a:p>
-            <a:fld id="{F7021451-1387-4CA6-816F-3879F97B5CBC}" type="slidenum">
-              <a:rPr lang="en-US"/>
-              <a:t>17</a:t>
-            </a:fld>
-            <a:endParaRPr lang="en-US"/>
-          </a:p>
-        </p:txBody>
-      </p:sp>
-    </p:spTree>
-    <p:extLst>
-      <p:ext uri="{BB962C8B-B14F-4D97-AF65-F5344CB8AC3E}">
-        <p14:creationId xmlns:p14="http://schemas.microsoft.com/office/powerpoint/2010/main" val="1024086991"/>
-      </p:ext>
-    </p:extLst>
-  </p:cSld>
-  <p:clrMapOvr>
-    <a:masterClrMapping/>
-  </p:clrMapOvr>
-</p:notes>
-</file>
-
-<file path=ppt/notesSlides/notesSlide18.xml><?xml version="1.0" encoding="utf-8"?>
-<p:notes xmlns:a="http://schemas.openxmlformats.org/drawingml/2006/main" xmlns:r="http://schemas.openxmlformats.org/officeDocument/2006/relationships" xmlns:p="http://schemas.openxmlformats.org/presentationml/2006/main">
-  <p:cSld>
-    <p:spTree>
-      <p:nvGrpSpPr>
-        <p:cNvPr id="1" name=""/>
-        <p:cNvGrpSpPr/>
-        <p:nvPr/>
-      </p:nvGrpSpPr>
-      <p:grpSpPr>
-        <a:xfrm>
-          <a:off x="0" y="0"/>
-          <a:ext cx="0" cy="0"/>
-          <a:chOff x="0" y="0"/>
-          <a:chExt cx="0" cy="0"/>
-        </a:xfrm>
-      </p:grpSpPr>
-      <p:sp>
-        <p:nvSpPr>
-          <p:cNvPr id="2" name="Slide Image Placeholder 1"/>
-          <p:cNvSpPr>
-            <a:spLocks noGrp="1" noRot="1" noChangeAspect="1"/>
-          </p:cNvSpPr>
-          <p:nvPr>
-            <p:ph type="sldImg"/>
-          </p:nvPr>
-        </p:nvSpPr>
-        <p:spPr/>
-      </p:sp>
-      <p:sp>
-        <p:nvSpPr>
-          <p:cNvPr id="3" name="Notes Placeholder 2"/>
-          <p:cNvSpPr>
-            <a:spLocks noGrp="1"/>
-          </p:cNvSpPr>
-          <p:nvPr>
-            <p:ph type="body" idx="1"/>
-          </p:nvPr>
-        </p:nvSpPr>
-        <p:spPr/>
-        <p:txBody>
-          <a:bodyPr/>
-          <a:lstStyle/>
-          <a:p>
-            <a:endParaRPr lang="en-US" dirty="0"/>
-          </a:p>
-        </p:txBody>
-      </p:sp>
-      <p:sp>
-        <p:nvSpPr>
-          <p:cNvPr id="4" name="Slide Number Placeholder 3"/>
-          <p:cNvSpPr>
-            <a:spLocks noGrp="1"/>
-          </p:cNvSpPr>
-          <p:nvPr>
-            <p:ph type="sldNum" sz="quarter" idx="10"/>
-          </p:nvPr>
-        </p:nvSpPr>
-        <p:spPr/>
-        <p:txBody>
-          <a:bodyPr/>
-          <a:lstStyle/>
-          <a:p>
-            <a:fld id="{F7021451-1387-4CA6-816F-3879F97B5CBC}" type="slidenum">
-              <a:rPr lang="en-US"/>
               <a:t>18</a:t>
             </a:fld>
             <a:endParaRPr lang="en-US"/>
@@ -1663,7 +1495,7 @@
           <a:p>
             <a:fld id="{F7021451-1387-4CA6-816F-3879F97B5CBC}" type="slidenum">
               <a:rPr lang="en-US"/>
-              <a:t>8</a:t>
+              <a:t>9</a:t>
             </a:fld>
             <a:endParaRPr lang="en-US"/>
           </a:p>
@@ -1747,7 +1579,7 @@
           <a:p>
             <a:fld id="{F7021451-1387-4CA6-816F-3879F97B5CBC}" type="slidenum">
               <a:rPr lang="en-US"/>
-              <a:t>9</a:t>
+              <a:t>10</a:t>
             </a:fld>
             <a:endParaRPr lang="en-US"/>
           </a:p>
@@ -1796,6 +1628,101 @@
 </p:sldLayout>
 </file>
 
+<file path=ppt/slideLayouts/slideLayout2.xml><?xml version="1.0" encoding="utf-8"?>
+<p:sldLayout xmlns:a="http://schemas.openxmlformats.org/drawingml/2006/main" xmlns:r="http://schemas.openxmlformats.org/officeDocument/2006/relationships" xmlns:p="http://schemas.openxmlformats.org/presentationml/2006/main" type="blank">
+  <p:cSld name="Blank">
+    <p:spTree>
+      <p:nvGrpSpPr>
+        <p:cNvPr id="1" name=""/>
+        <p:cNvGrpSpPr/>
+        <p:nvPr/>
+      </p:nvGrpSpPr>
+      <p:grpSpPr>
+        <a:xfrm>
+          <a:off x="0" y="0"/>
+          <a:ext cx="0" cy="0"/>
+          <a:chOff x="0" y="0"/>
+          <a:chExt cx="0" cy="0"/>
+        </a:xfrm>
+      </p:grpSpPr>
+      <p:sp>
+        <p:nvSpPr>
+          <p:cNvPr id="2" name="Date Placeholder 1"/>
+          <p:cNvSpPr>
+            <a:spLocks noGrp="1"/>
+          </p:cNvSpPr>
+          <p:nvPr>
+            <p:ph type="dt" sz="half" idx="10"/>
+          </p:nvPr>
+        </p:nvSpPr>
+        <p:spPr/>
+        <p:txBody>
+          <a:bodyPr/>
+          <a:lstStyle/>
+          <a:p>
+            <a:fld id="{5BCAD085-E8A6-8845-BD4E-CB4CCA059FC4}" type="datetimeFigureOut">
+              <a:rPr lang="en-US" smtClean="0"/>
+              <a:t>6/21/2026</a:t>
+            </a:fld>
+            <a:endParaRPr lang="en-US"/>
+          </a:p>
+        </p:txBody>
+      </p:sp>
+      <p:sp>
+        <p:nvSpPr>
+          <p:cNvPr id="3" name="Footer Placeholder 2"/>
+          <p:cNvSpPr>
+            <a:spLocks noGrp="1"/>
+          </p:cNvSpPr>
+          <p:nvPr>
+            <p:ph type="ftr" sz="quarter" idx="11"/>
+          </p:nvPr>
+        </p:nvSpPr>
+        <p:spPr/>
+        <p:txBody>
+          <a:bodyPr/>
+          <a:lstStyle/>
+          <a:p>
+            <a:endParaRPr lang="en-US"/>
+          </a:p>
+        </p:txBody>
+      </p:sp>
+      <p:sp>
+        <p:nvSpPr>
+          <p:cNvPr id="4" name="Slide Number Placeholder 3"/>
+          <p:cNvSpPr>
+            <a:spLocks noGrp="1"/>
+          </p:cNvSpPr>
+          <p:nvPr>
+            <p:ph type="sldNum" sz="quarter" idx="12"/>
+          </p:nvPr>
+        </p:nvSpPr>
+        <p:spPr/>
+        <p:txBody>
+          <a:bodyPr/>
+          <a:lstStyle/>
+          <a:p>
+            <a:fld id="{C1FF6DA9-008F-8B48-92A6-B652298478BF}" type="slidenum">
+              <a:rPr lang="en-US" smtClean="0"/>
+              <a:t>‹#›</a:t>
+            </a:fld>
+            <a:endParaRPr lang="en-US"/>
+          </a:p>
+        </p:txBody>
+      </p:sp>
+    </p:spTree>
+    <p:extLst>
+      <p:ext uri="{BB962C8B-B14F-4D97-AF65-F5344CB8AC3E}">
+        <p14:creationId xmlns:p14="http://schemas.microsoft.com/office/powerpoint/2010/main" val="2137168866"/>
+      </p:ext>
+    </p:extLst>
+  </p:cSld>
+  <p:clrMapOvr>
+    <a:masterClrMapping/>
+  </p:clrMapOvr>
+</p:sldLayout>
+</file>
+
 <file path=ppt/slideMasters/slideMaster1.xml><?xml version="1.0" encoding="utf-8"?>
 <p:sldMaster xmlns:a="http://schemas.openxmlformats.org/drawingml/2006/main" xmlns:r="http://schemas.openxmlformats.org/officeDocument/2006/relationships" xmlns:p="http://schemas.openxmlformats.org/presentationml/2006/main">
   <p:cSld>
@@ -1823,6 +1750,7 @@
   <p:clrMap bg1="lt1" tx1="dk1" bg2="lt2" tx2="dk2" accent1="accent1" accent2="accent2" accent3="accent3" accent4="accent4" accent5="accent5" accent6="accent6" hlink="hlink" folHlink="folHlink"/>
   <p:sldLayoutIdLst>
     <p:sldLayoutId id="2147483649" r:id="rId1"/>
+    <p:sldLayoutId id="2147483650" r:id="rId2"/>
   </p:sldLayoutIdLst>
   <p:hf sldNum="0" hdr="0" ftr="0" dt="0"/>
   <p:txStyles>
@@ -4140,15 +4068,7 @@
 
 <file path=ppt/slides/slide12.xml><?xml version="1.0" encoding="utf-8"?>
 <p:sld xmlns:a="http://schemas.openxmlformats.org/drawingml/2006/main" xmlns:r="http://schemas.openxmlformats.org/officeDocument/2006/relationships" xmlns:p="http://schemas.openxmlformats.org/presentationml/2006/main">
-  <p:cSld name="Slide 12">
-    <p:bg>
-      <p:bgPr>
-        <a:solidFill>
-          <a:srgbClr val="FFFFFF"/>
-        </a:solidFill>
-        <a:effectLst/>
-      </p:bgPr>
-    </p:bg>
+  <p:cSld>
     <p:spTree>
       <p:nvGrpSpPr>
         <p:cNvPr id="1" name=""/>
@@ -4165,7 +4085,7 @@
       </p:grpSpPr>
       <p:sp>
         <p:nvSpPr>
-          <p:cNvPr id="2" name="Shape 0"/>
+          <p:cNvPr id="2" name="Rectangle 1"/>
           <p:cNvSpPr/>
           <p:nvPr/>
         </p:nvSpPr>
@@ -4180,19 +4100,37 @@
           <a:solidFill>
             <a:srgbClr val="0E3A40"/>
           </a:solidFill>
-          <a:ln/>
-        </p:spPr>
-        <p:txBody>
-          <a:bodyPr/>
-          <a:lstStyle/>
-          <a:p>
-            <a:endParaRPr lang="en-US"/>
-          </a:p>
-        </p:txBody>
-      </p:sp>
-      <p:sp>
-        <p:nvSpPr>
-          <p:cNvPr id="3" name="Shape 1"/>
+          <a:ln>
+            <a:noFill/>
+          </a:ln>
+          <a:effectLst/>
+        </p:spPr>
+        <p:style>
+          <a:lnRef idx="1">
+            <a:schemeClr val="accent1"/>
+          </a:lnRef>
+          <a:fillRef idx="3">
+            <a:schemeClr val="accent1"/>
+          </a:fillRef>
+          <a:effectRef idx="2">
+            <a:schemeClr val="accent1"/>
+          </a:effectRef>
+          <a:fontRef idx="minor">
+            <a:schemeClr val="lt1"/>
+          </a:fontRef>
+        </p:style>
+        <p:txBody>
+          <a:bodyPr rtlCol="0" anchor="ctr"/>
+          <a:lstStyle/>
+          <a:p>
+            <a:pPr algn="ctr"/>
+            <a:endParaRPr/>
+          </a:p>
+        </p:txBody>
+      </p:sp>
+      <p:sp>
+        <p:nvSpPr>
+          <p:cNvPr id="3" name="Rectangle 2"/>
           <p:cNvSpPr/>
           <p:nvPr/>
         </p:nvSpPr>
@@ -4207,20 +4145,38 @@
           <a:solidFill>
             <a:srgbClr val="C05621"/>
           </a:solidFill>
-          <a:ln/>
-        </p:spPr>
-        <p:txBody>
-          <a:bodyPr/>
-          <a:lstStyle/>
-          <a:p>
-            <a:endParaRPr lang="en-US"/>
-          </a:p>
-        </p:txBody>
-      </p:sp>
-      <p:sp>
-        <p:nvSpPr>
-          <p:cNvPr id="4" name="Text 2"/>
-          <p:cNvSpPr/>
+          <a:ln>
+            <a:noFill/>
+          </a:ln>
+          <a:effectLst/>
+        </p:spPr>
+        <p:style>
+          <a:lnRef idx="1">
+            <a:schemeClr val="accent1"/>
+          </a:lnRef>
+          <a:fillRef idx="3">
+            <a:schemeClr val="accent1"/>
+          </a:fillRef>
+          <a:effectRef idx="2">
+            <a:schemeClr val="accent1"/>
+          </a:effectRef>
+          <a:fontRef idx="minor">
+            <a:schemeClr val="lt1"/>
+          </a:fontRef>
+        </p:style>
+        <p:txBody>
+          <a:bodyPr rtlCol="0" anchor="ctr"/>
+          <a:lstStyle/>
+          <a:p>
+            <a:pPr algn="ctr"/>
+            <a:endParaRPr/>
+          </a:p>
+        </p:txBody>
+      </p:sp>
+      <p:sp>
+        <p:nvSpPr>
+          <p:cNvPr id="4" name="TextBox 3"/>
+          <p:cNvSpPr txBox="1"/>
           <p:nvPr/>
         </p:nvSpPr>
         <p:spPr>
@@ -4232,344 +4188,285 @@
             <a:avLst/>
           </a:prstGeom>
           <a:noFill/>
-          <a:ln/>
-        </p:spPr>
-        <p:txBody>
-          <a:bodyPr wrap="square" lIns="25400" tIns="25400" rIns="25400" bIns="25400" rtlCol="0" anchor="t"/>
-          <a:lstStyle/>
-          <a:p>
-            <a:pPr marL="0" indent="0" algn="l">
-              <a:lnSpc>
-                <a:spcPct val="100000"/>
-              </a:lnSpc>
-              <a:buNone/>
-            </a:pPr>
-            <a:r>
-              <a:rPr lang="en-US" sz="1100" b="1" kern="0" spc="300" dirty="0">
-                <a:solidFill>
-                  <a:srgbClr val="CFE6E9"/>
-                </a:solidFill>
-                <a:latin typeface="Calibri" pitchFamily="34" charset="0"/>
-                <a:ea typeface="Calibri" pitchFamily="34" charset="-122"/>
-                <a:cs typeface="Calibri" pitchFamily="34" charset="-120"/>
-              </a:rPr>
-              <a:t>WHAT WE CAN'T CLAIM</a:t>
-            </a:r>
-            <a:endParaRPr lang="en-US" sz="1100" dirty="0"/>
-          </a:p>
-        </p:txBody>
-      </p:sp>
-      <p:sp>
-        <p:nvSpPr>
-          <p:cNvPr id="5" name="Text 3"/>
-          <p:cNvSpPr/>
-          <p:nvPr/>
-        </p:nvSpPr>
-        <p:spPr>
-          <a:xfrm>
-            <a:off x="502920" y="493776"/>
-            <a:ext cx="10058400" cy="566928"/>
-          </a:xfrm>
-          <a:prstGeom prst="rect">
-            <a:avLst/>
-          </a:prstGeom>
-          <a:noFill/>
-          <a:ln/>
-        </p:spPr>
-        <p:txBody>
-          <a:bodyPr wrap="square" lIns="25400" tIns="25400" rIns="25400" bIns="25400" rtlCol="0" anchor="ctr"/>
-          <a:lstStyle/>
-          <a:p>
-            <a:pPr marL="0" indent="0" algn="l">
-              <a:lnSpc>
-                <a:spcPct val="100000"/>
-              </a:lnSpc>
-              <a:buNone/>
-            </a:pPr>
-            <a:r>
-              <a:rPr lang="en-US" sz="2500" b="1" dirty="0">
-                <a:solidFill>
-                  <a:srgbClr val="FFFFFF"/>
-                </a:solidFill>
-                <a:latin typeface="Georgia" pitchFamily="34" charset="0"/>
-                <a:ea typeface="Georgia" pitchFamily="34" charset="-122"/>
-                <a:cs typeface="Georgia" pitchFamily="34" charset="-120"/>
-              </a:rPr>
-              <a:t>Limitations &amp; honest scope</a:t>
-            </a:r>
-            <a:endParaRPr lang="en-US" sz="2500" dirty="0"/>
-          </a:p>
-        </p:txBody>
-      </p:sp>
-      <p:pic>
-        <p:nvPicPr>
-          <p:cNvPr id="6" name="Image 0" descr="/sessions/hopeful-blissful-volta/mnt/Genomics/Hackathon/presentation/assets/fig7.png"/>
-          <p:cNvPicPr>
-            <a:picLocks noChangeAspect="1"/>
-          </p:cNvPicPr>
-          <p:nvPr/>
-        </p:nvPicPr>
-        <p:blipFill>
-          <a:blip r:embed="rId3"/>
-          <a:srcRect/>
-          <a:stretch/>
-        </p:blipFill>
-        <p:spPr>
-          <a:xfrm>
-            <a:off x="6841068" y="1554481"/>
-            <a:ext cx="5012266" cy="2217420"/>
-          </a:xfrm>
-          <a:prstGeom prst="rect">
-            <a:avLst/>
-          </a:prstGeom>
-        </p:spPr>
-      </p:pic>
-      <p:sp>
-        <p:nvSpPr>
-          <p:cNvPr id="7" name="Text 4"/>
-          <p:cNvSpPr/>
-          <p:nvPr/>
-        </p:nvSpPr>
-        <p:spPr>
-          <a:xfrm>
-            <a:off x="338667" y="1634914"/>
-            <a:ext cx="6654800" cy="2374053"/>
-          </a:xfrm>
-          <a:prstGeom prst="rect">
-            <a:avLst/>
-          </a:prstGeom>
-          <a:noFill/>
-          <a:ln/>
-        </p:spPr>
-        <p:txBody>
-          <a:bodyPr wrap="square" lIns="25400" tIns="25400" rIns="25400" bIns="25400" rtlCol="0" anchor="t"/>
-          <a:lstStyle/>
-          <a:p>
-            <a:pPr>
-              <a:lnSpc>
-                <a:spcPct val="110000"/>
-              </a:lnSpc>
-            </a:pPr>
-            <a:r>
-              <a:rPr lang="en-US" sz="2000" b="1" dirty="0">
-                <a:solidFill>
-                  <a:srgbClr val="0E3A40"/>
-                </a:solidFill>
-                <a:latin typeface="Calibri" pitchFamily="34" charset="0"/>
-                <a:ea typeface="Calibri" pitchFamily="34" charset="-122"/>
-                <a:cs typeface="Calibri" pitchFamily="34" charset="-120"/>
-              </a:rPr>
-              <a:t>• Associational</a:t>
-            </a:r>
-            <a:endParaRPr lang="en-US" sz="2000" dirty="0"/>
-          </a:p>
-          <a:p>
-            <a:pPr>
-              <a:lnSpc>
-                <a:spcPct val="110000"/>
-              </a:lnSpc>
-            </a:pPr>
-            <a:r>
-              <a:rPr lang="en-US" sz="2000" dirty="0">
-                <a:solidFill>
-                  <a:srgbClr val="1F2733"/>
-                </a:solidFill>
-                <a:latin typeface="Calibri" pitchFamily="34" charset="0"/>
-                <a:ea typeface="Calibri" pitchFamily="34" charset="-122"/>
-                <a:cs typeface="Calibri" pitchFamily="34" charset="-120"/>
-              </a:rPr>
-              <a:t> 	— we measure collapse, not its cause</a:t>
-            </a:r>
-          </a:p>
-          <a:p>
-            <a:pPr>
-              <a:lnSpc>
-                <a:spcPct val="110000"/>
-              </a:lnSpc>
-            </a:pPr>
-            <a:r>
-              <a:rPr lang="en-US" sz="2000" dirty="0">
-                <a:solidFill>
-                  <a:srgbClr val="1F2733"/>
-                </a:solidFill>
-                <a:latin typeface="Calibri" pitchFamily="34" charset="0"/>
-                <a:ea typeface="Calibri" pitchFamily="34" charset="-122"/>
-                <a:cs typeface="Calibri" pitchFamily="34" charset="-120"/>
-              </a:rPr>
-              <a:t>.</a:t>
-            </a:r>
-            <a:endParaRPr lang="en-US" sz="2000" dirty="0"/>
-          </a:p>
-          <a:p>
-            <a:pPr marL="0" indent="0" algn="l">
-              <a:lnSpc>
-                <a:spcPct val="110000"/>
-              </a:lnSpc>
-              <a:buNone/>
-            </a:pPr>
-            <a:r>
-              <a:rPr lang="en-US" sz="2000" b="1" dirty="0">
-                <a:solidFill>
-                  <a:srgbClr val="0E3A40"/>
-                </a:solidFill>
-                <a:latin typeface="Calibri" pitchFamily="34" charset="0"/>
-                <a:ea typeface="Calibri" pitchFamily="34" charset="-122"/>
-                <a:cs typeface="Calibri" pitchFamily="34" charset="-120"/>
-              </a:rPr>
-              <a:t>• Pseudo-zonal, not (x,y)</a:t>
-            </a:r>
-            <a:endParaRPr lang="en-US" sz="2000" dirty="0"/>
-          </a:p>
-          <a:p>
-            <a:pPr marL="0" indent="0" algn="l">
-              <a:lnSpc>
-                <a:spcPct val="110000"/>
-              </a:lnSpc>
-              <a:buNone/>
-            </a:pPr>
-            <a:r>
-              <a:rPr lang="en-US" sz="2000" dirty="0">
-                <a:solidFill>
-                  <a:srgbClr val="1F2733"/>
-                </a:solidFill>
-                <a:latin typeface="Calibri" pitchFamily="34" charset="0"/>
-                <a:ea typeface="Calibri" pitchFamily="34" charset="-122"/>
-                <a:cs typeface="Calibri" pitchFamily="34" charset="-120"/>
-              </a:rPr>
-              <a:t>	 — a 1-D reconstructed coordinate</a:t>
-            </a:r>
-          </a:p>
-        </p:txBody>
-      </p:sp>
-      <p:sp>
-        <p:nvSpPr>
-          <p:cNvPr id="8" name="TextBox 7">
-            <a:extLst>
-              <a:ext uri="{FF2B5EF4-FFF2-40B4-BE49-F238E27FC236}">
-                <a16:creationId xmlns:a16="http://schemas.microsoft.com/office/drawing/2014/main" id="{BCCDA51D-162C-D6C3-0789-29FE43F6EC36}"/>
-              </a:ext>
-            </a:extLst>
-          </p:cNvPr>
-          <p:cNvSpPr txBox="1"/>
-          <p:nvPr/>
-        </p:nvSpPr>
-        <p:spPr>
-          <a:xfrm>
-            <a:off x="338667" y="3486649"/>
-            <a:ext cx="11332633" cy="2092881"/>
-          </a:xfrm>
-          <a:prstGeom prst="rect">
-            <a:avLst/>
-          </a:prstGeom>
-          <a:noFill/>
-        </p:spPr>
-        <p:txBody>
-          <a:bodyPr wrap="square" rtlCol="0">
+        </p:spPr>
+        <p:txBody>
+          <a:bodyPr wrap="square" lIns="0" tIns="0" rIns="0" bIns="0" anchor="t">
             <a:spAutoFit/>
           </a:bodyPr>
           <a:lstStyle/>
           <a:p>
-            <a:pPr>
-              <a:lnSpc>
-                <a:spcPct val="110000"/>
-              </a:lnSpc>
-            </a:pPr>
-            <a:r>
-              <a:rPr lang="en-US" sz="2000" b="1" dirty="0">
-                <a:solidFill>
-                  <a:srgbClr val="0E3A40"/>
-                </a:solidFill>
-                <a:latin typeface="Calibri" pitchFamily="34" charset="0"/>
-                <a:ea typeface="Calibri" pitchFamily="34" charset="-122"/>
-                <a:cs typeface="Calibri" pitchFamily="34" charset="-120"/>
-              </a:rPr>
-              <a:t>• Ruler-validity matters</a:t>
-            </a:r>
-            <a:endParaRPr lang="en-US" sz="2000" dirty="0"/>
-          </a:p>
-          <a:p>
-            <a:pPr>
-              <a:lnSpc>
-                <a:spcPct val="110000"/>
-              </a:lnSpc>
-            </a:pPr>
-            <a:r>
-              <a:rPr lang="en-US" sz="2000" dirty="0">
+            <a:pPr algn="l">
+              <a:lnSpc>
+                <a:spcPct val="100000"/>
+              </a:lnSpc>
+            </a:pPr>
+            <a:r>
+              <a:rPr sz="1100" b="1" i="0">
+                <a:solidFill>
+                  <a:srgbClr val="CFE6E9"/>
+                </a:solidFill>
+                <a:latin typeface="Calibri"/>
+              </a:rPr>
+              <a:t>  HONEST SCOPE</a:t>
+            </a:r>
+          </a:p>
+        </p:txBody>
+      </p:sp>
+      <p:sp>
+        <p:nvSpPr>
+          <p:cNvPr id="5" name="TextBox 4"/>
+          <p:cNvSpPr txBox="1"/>
+          <p:nvPr/>
+        </p:nvSpPr>
+        <p:spPr>
+          <a:xfrm>
+            <a:off x="502920" y="493776"/>
+            <a:ext cx="10515600" cy="566928"/>
+          </a:xfrm>
+          <a:prstGeom prst="rect">
+            <a:avLst/>
+          </a:prstGeom>
+          <a:noFill/>
+        </p:spPr>
+        <p:txBody>
+          <a:bodyPr wrap="square" lIns="0" tIns="0" rIns="0" bIns="0" anchor="ctr">
+            <a:spAutoFit/>
+          </a:bodyPr>
+          <a:lstStyle/>
+          <a:p>
+            <a:pPr algn="l">
+              <a:lnSpc>
+                <a:spcPct val="100000"/>
+              </a:lnSpc>
+            </a:pPr>
+            <a:r>
+              <a:rPr sz="2500" b="1" i="0">
+                <a:solidFill>
+                  <a:srgbClr val="FFFFFF"/>
+                </a:solidFill>
+                <a:latin typeface="Georgia"/>
+              </a:rPr>
+              <a:t>Limitations</a:t>
+            </a:r>
+          </a:p>
+        </p:txBody>
+      </p:sp>
+      <p:sp>
+        <p:nvSpPr>
+          <p:cNvPr id="6" name="TextBox 5"/>
+          <p:cNvSpPr txBox="1"/>
+          <p:nvPr/>
+        </p:nvSpPr>
+        <p:spPr>
+          <a:xfrm>
+            <a:off x="640080" y="1463040"/>
+            <a:ext cx="10972800" cy="771814"/>
+          </a:xfrm>
+          <a:prstGeom prst="rect">
+            <a:avLst/>
+          </a:prstGeom>
+          <a:noFill/>
+        </p:spPr>
+        <p:txBody>
+          <a:bodyPr wrap="square" lIns="0" tIns="0" rIns="0" bIns="0" anchor="t">
+            <a:spAutoFit/>
+          </a:bodyPr>
+          <a:lstStyle/>
+          <a:p>
+            <a:pPr algn="l">
+              <a:lnSpc>
+                <a:spcPct val="106000"/>
+              </a:lnSpc>
+            </a:pPr>
+            <a:r>
+              <a:rPr sz="1600" b="1" i="0" dirty="0">
+                <a:solidFill>
+                  <a:srgbClr val="16545C"/>
+                </a:solidFill>
+                <a:latin typeface="Calibri"/>
+              </a:rPr>
+              <a:t>Ruler-validity.  </a:t>
+            </a:r>
+            <a:r>
+              <a:rPr sz="1600" b="0" i="0" dirty="0">
                 <a:solidFill>
                   <a:srgbClr val="1F2733"/>
                 </a:solidFill>
-                <a:latin typeface="Calibri" pitchFamily="34" charset="0"/>
-                <a:ea typeface="Calibri" pitchFamily="34" charset="-122"/>
-                <a:cs typeface="Calibri" pitchFamily="34" charset="-120"/>
-              </a:rPr>
-              <a:t>	 — disease may corrupt the marker genes; Step 5b checks the ruler still holds.</a:t>
-            </a:r>
-          </a:p>
-          <a:p>
-            <a:pPr>
-              <a:lnSpc>
-                <a:spcPct val="110000"/>
-              </a:lnSpc>
-            </a:pPr>
-            <a:endParaRPr lang="en-US" sz="2000" dirty="0">
-              <a:solidFill>
-                <a:srgbClr val="1F2733"/>
-              </a:solidFill>
-              <a:latin typeface="Calibri" pitchFamily="34" charset="0"/>
-              <a:ea typeface="Calibri" pitchFamily="34" charset="-122"/>
-              <a:cs typeface="Calibri" pitchFamily="34" charset="-120"/>
-            </a:endParaRPr>
-          </a:p>
-          <a:p>
-            <a:pPr>
-              <a:lnSpc>
-                <a:spcPct val="110000"/>
-              </a:lnSpc>
-            </a:pPr>
-            <a:r>
-              <a:rPr lang="en-US" sz="2000" b="1" dirty="0">
-                <a:solidFill>
-                  <a:srgbClr val="0E3A40"/>
-                </a:solidFill>
-                <a:latin typeface="Calibri" pitchFamily="34" charset="0"/>
-                <a:ea typeface="Calibri" pitchFamily="34" charset="-122"/>
-                <a:cs typeface="Calibri" pitchFamily="34" charset="-120"/>
-              </a:rPr>
-              <a:t>• Blind to pure spatial scrambling</a:t>
-            </a:r>
-            <a:r>
-              <a:rPr lang="en-US" sz="2000" dirty="0">
+                <a:latin typeface="Calibri"/>
+              </a:rPr>
+              <a:t>Disease may corrupt the very marker genes the coordinate relies on</a:t>
+            </a:r>
+            <a:r>
+              <a:rPr lang="en-US" sz="1600" b="0" i="0" dirty="0">
                 <a:solidFill>
                   <a:srgbClr val="1F2733"/>
                 </a:solidFill>
-                <a:latin typeface="Calibri" pitchFamily="34" charset="0"/>
-                <a:ea typeface="Calibri" pitchFamily="34" charset="-122"/>
-                <a:cs typeface="Calibri" pitchFamily="34" charset="-120"/>
-              </a:rPr>
-              <a:t> </a:t>
-            </a:r>
-          </a:p>
-          <a:p>
-            <a:pPr>
-              <a:lnSpc>
-                <a:spcPct val="110000"/>
-              </a:lnSpc>
-            </a:pPr>
-            <a:r>
-              <a:rPr lang="en-US" sz="2000" dirty="0">
+                <a:latin typeface="Calibri"/>
+              </a:rPr>
+              <a:t>,</a:t>
+            </a:r>
+            <a:r>
+              <a:rPr sz="1600" b="0" i="0" dirty="0">
                 <a:solidFill>
                   <a:srgbClr val="1F2733"/>
                 </a:solidFill>
-                <a:latin typeface="Calibri" pitchFamily="34" charset="0"/>
-                <a:ea typeface="Calibri" pitchFamily="34" charset="-122"/>
-                <a:cs typeface="Calibri" pitchFamily="34" charset="-120"/>
-              </a:rPr>
-              <a:t>	 — if cells keep identity but move, dissociated data sees nothing (very unlikely).</a:t>
-            </a:r>
-            <a:endParaRPr lang="en-US" sz="2000" dirty="0"/>
-          </a:p>
-          <a:p>
-            <a:endParaRPr lang="en-US" sz="2000" dirty="0"/>
+                <a:latin typeface="Calibri"/>
+              </a:rPr>
+              <a:t> so a 'collapse' could be the ruler falling apart rather than true de-zonation. </a:t>
+            </a:r>
+            <a:r>
+              <a:rPr lang="en-US" sz="1600" b="0" i="0" dirty="0">
+                <a:solidFill>
+                  <a:srgbClr val="1F2733"/>
+                </a:solidFill>
+                <a:latin typeface="Calibri"/>
+              </a:rPr>
+              <a:t>Step 5b diagnostics (internal coherence, PC–PP anti-correlation, split-half reproducibility) tell these apart before we make any claim.</a:t>
+            </a:r>
+          </a:p>
+        </p:txBody>
+      </p:sp>
+      <p:sp>
+        <p:nvSpPr>
+          <p:cNvPr id="7" name="TextBox 6"/>
+          <p:cNvSpPr txBox="1"/>
+          <p:nvPr/>
+        </p:nvSpPr>
+        <p:spPr>
+          <a:xfrm>
+            <a:off x="640080" y="2697480"/>
+            <a:ext cx="10972800" cy="510845"/>
+          </a:xfrm>
+          <a:prstGeom prst="rect">
+            <a:avLst/>
+          </a:prstGeom>
+          <a:noFill/>
+        </p:spPr>
+        <p:txBody>
+          <a:bodyPr wrap="square" lIns="0" tIns="0" rIns="0" bIns="0" anchor="t">
+            <a:spAutoFit/>
+          </a:bodyPr>
+          <a:lstStyle/>
+          <a:p>
+            <a:pPr algn="l">
+              <a:lnSpc>
+                <a:spcPct val="106000"/>
+              </a:lnSpc>
+            </a:pPr>
+            <a:r>
+              <a:rPr sz="1600" b="1" i="0" dirty="0">
+                <a:solidFill>
+                  <a:srgbClr val="16545C"/>
+                </a:solidFill>
+                <a:latin typeface="Calibri"/>
+              </a:rPr>
+              <a:t>Few patients at the extremes.  </a:t>
+            </a:r>
+            <a:r>
+              <a:rPr sz="1600" b="0" i="0" dirty="0">
+                <a:solidFill>
+                  <a:srgbClr val="1F2733"/>
+                </a:solidFill>
+                <a:latin typeface="Calibri"/>
+              </a:rPr>
+              <a:t>The cohort thins at the ends — cirrhosis (n = 4) and end-stage (n = 5) — so the donor-level trend rests on a handful of people there; the tails of the curve carry the widest confidence intervals.</a:t>
+            </a:r>
+          </a:p>
+        </p:txBody>
+      </p:sp>
+      <p:sp>
+        <p:nvSpPr>
+          <p:cNvPr id="8" name="TextBox 7"/>
+          <p:cNvSpPr txBox="1"/>
+          <p:nvPr/>
+        </p:nvSpPr>
+        <p:spPr>
+          <a:xfrm>
+            <a:off x="640080" y="3931920"/>
+            <a:ext cx="10972800" cy="771814"/>
+          </a:xfrm>
+          <a:prstGeom prst="rect">
+            <a:avLst/>
+          </a:prstGeom>
+          <a:noFill/>
+        </p:spPr>
+        <p:txBody>
+          <a:bodyPr wrap="square" lIns="0" tIns="0" rIns="0" bIns="0" anchor="t">
+            <a:spAutoFit/>
+          </a:bodyPr>
+          <a:lstStyle/>
+          <a:p>
+            <a:pPr algn="l">
+              <a:lnSpc>
+                <a:spcPct val="106000"/>
+              </a:lnSpc>
+            </a:pPr>
+            <a:r>
+              <a:rPr sz="1600" b="1" i="0" dirty="0">
+                <a:solidFill>
+                  <a:srgbClr val="16545C"/>
+                </a:solidFill>
+                <a:latin typeface="Calibri"/>
+              </a:rPr>
+              <a:t>Cross-dataset transfer.  </a:t>
+            </a:r>
+            <a:r>
+              <a:rPr sz="1600" b="0" i="0" dirty="0">
+                <a:solidFill>
+                  <a:srgbClr val="1F2733"/>
+                </a:solidFill>
+                <a:latin typeface="Calibri"/>
+              </a:rPr>
+              <a:t>The ruler is learned on a different healthy cohort and platform; residual batch effects could tilt the coordinate. We mitigate with rank/z features, a same-platform (snRNA) classifier, and the healthy positive control — but it remains a caveat.</a:t>
+            </a:r>
+          </a:p>
+        </p:txBody>
+      </p:sp>
+      <p:sp>
+        <p:nvSpPr>
+          <p:cNvPr id="9" name="TextBox 8"/>
+          <p:cNvSpPr txBox="1"/>
+          <p:nvPr/>
+        </p:nvSpPr>
+        <p:spPr>
+          <a:xfrm>
+            <a:off x="640080" y="5166360"/>
+            <a:ext cx="10972800" cy="510845"/>
+          </a:xfrm>
+          <a:prstGeom prst="rect">
+            <a:avLst/>
+          </a:prstGeom>
+          <a:noFill/>
+        </p:spPr>
+        <p:txBody>
+          <a:bodyPr wrap="square" lIns="0" tIns="0" rIns="0" bIns="0" anchor="t">
+            <a:spAutoFit/>
+          </a:bodyPr>
+          <a:lstStyle/>
+          <a:p>
+            <a:pPr algn="l">
+              <a:lnSpc>
+                <a:spcPct val="106000"/>
+              </a:lnSpc>
+            </a:pPr>
+            <a:r>
+              <a:rPr sz="1600" b="1" i="0" dirty="0">
+                <a:solidFill>
+                  <a:srgbClr val="5A6472"/>
+                </a:solidFill>
+                <a:latin typeface="Calibri"/>
+              </a:rPr>
+              <a:t>Minor caveat — spatial scrambling.  </a:t>
+            </a:r>
+            <a:r>
+              <a:rPr sz="1600" b="0" i="0" dirty="0">
+                <a:solidFill>
+                  <a:srgbClr val="1F2733"/>
+                </a:solidFill>
+                <a:latin typeface="Calibri"/>
+              </a:rPr>
+              <a:t>If cells kept their expression identity but were physically rearranged, dissociated data couldn't see it. We judge this biologically very unlikely in MASLD, and note it only for completeness.</a:t>
+            </a:r>
           </a:p>
         </p:txBody>
       </p:sp>
@@ -7919,12 +7816,57 @@
           <a:bodyPr wrap="square" lIns="25400" tIns="25400" rIns="25400" bIns="25400" rtlCol="0" anchor="t"/>
           <a:lstStyle/>
           <a:p>
+            <a:pPr marL="0" indent="0" algn="ctr">
+              <a:lnSpc>
+                <a:spcPct val="106000"/>
+              </a:lnSpc>
+              <a:buNone/>
+            </a:pPr>
+            <a:r>
+              <a:rPr lang="en-US" sz="2400" b="1" dirty="0">
+                <a:solidFill>
+                  <a:srgbClr val="1F2733"/>
+                </a:solidFill>
+                <a:latin typeface="Calibri" pitchFamily="34" charset="0"/>
+                <a:ea typeface="Calibri" pitchFamily="34" charset="-122"/>
+                <a:cs typeface="Calibri" pitchFamily="34" charset="-120"/>
+              </a:rPr>
+              <a:t>Loses its POSITION </a:t>
+            </a:r>
+          </a:p>
+          <a:p>
             <a:pPr marL="0" indent="0" algn="l">
               <a:lnSpc>
                 <a:spcPct val="106000"/>
               </a:lnSpc>
               <a:buNone/>
             </a:pPr>
+            <a:endParaRPr lang="en-US" sz="1350" dirty="0">
+              <a:solidFill>
+                <a:srgbClr val="1F2733"/>
+              </a:solidFill>
+              <a:latin typeface="Calibri" pitchFamily="34" charset="0"/>
+              <a:ea typeface="Calibri" pitchFamily="34" charset="-122"/>
+              <a:cs typeface="Calibri" pitchFamily="34" charset="-120"/>
+            </a:endParaRPr>
+          </a:p>
+          <a:p>
+            <a:pPr>
+              <a:lnSpc>
+                <a:spcPct val="106000"/>
+              </a:lnSpc>
+            </a:pPr>
+            <a:r>
+              <a:rPr lang="en-US" sz="1400" dirty="0">
+                <a:solidFill>
+                  <a:srgbClr val="1F2733"/>
+                </a:solidFill>
+                <a:latin typeface="Calibri" pitchFamily="34" charset="0"/>
+                <a:ea typeface="Calibri" pitchFamily="34" charset="-122"/>
+                <a:cs typeface="Calibri" pitchFamily="34" charset="-120"/>
+              </a:rPr>
+              <a:t>on the (portal ↔ central) axis – </a:t>
+            </a:r>
             <a:r>
               <a:rPr lang="en-US" sz="1350" dirty="0">
                 <a:solidFill>
@@ -7934,8 +7876,61 @@
                 <a:ea typeface="Calibri" pitchFamily="34" charset="-122"/>
                 <a:cs typeface="Calibri" pitchFamily="34" charset="-120"/>
               </a:rPr>
-              <a:t>Loses its POSITION on the portal↔central axis (still a hepatocyte).
-Co-expresses opposite zonal programs (CYP2E1 + ASS1).
+              <a:t>still a hepatocyte</a:t>
+            </a:r>
+          </a:p>
+          <a:p>
+            <a:pPr marL="0" indent="0" algn="l">
+              <a:lnSpc>
+                <a:spcPct val="106000"/>
+              </a:lnSpc>
+              <a:buNone/>
+            </a:pPr>
+            <a:r>
+              <a:rPr lang="en-US" sz="1350" dirty="0">
+                <a:solidFill>
+                  <a:srgbClr val="1F2733"/>
+                </a:solidFill>
+                <a:latin typeface="Calibri" pitchFamily="34" charset="0"/>
+                <a:ea typeface="Calibri" pitchFamily="34" charset="-122"/>
+                <a:cs typeface="Calibri" pitchFamily="34" charset="-120"/>
+              </a:rPr>
+              <a:t>Co-expresses opposite zonal programs (CYP2E1 + ASS1)</a:t>
+            </a:r>
+          </a:p>
+          <a:p>
+            <a:pPr marL="0" indent="0" algn="l">
+              <a:lnSpc>
+                <a:spcPct val="106000"/>
+              </a:lnSpc>
+              <a:buNone/>
+            </a:pPr>
+            <a:endParaRPr lang="en-US" sz="1350" dirty="0">
+              <a:solidFill>
+                <a:srgbClr val="1F2733"/>
+              </a:solidFill>
+              <a:latin typeface="Calibri" pitchFamily="34" charset="0"/>
+              <a:ea typeface="Calibri" pitchFamily="34" charset="-122"/>
+              <a:cs typeface="Calibri" pitchFamily="34" charset="-120"/>
+            </a:endParaRPr>
+          </a:p>
+          <a:p>
+            <a:pPr marL="0" indent="0" algn="l">
+              <a:lnSpc>
+                <a:spcPct val="106000"/>
+              </a:lnSpc>
+              <a:buNone/>
+            </a:pPr>
+            <a:r>
+              <a:rPr lang="en-US" sz="1350" dirty="0">
+                <a:solidFill>
+                  <a:srgbClr val="1F2733"/>
+                </a:solidFill>
+                <a:latin typeface="Calibri" pitchFamily="34" charset="0"/>
+                <a:ea typeface="Calibri" pitchFamily="34" charset="-122"/>
+                <a:cs typeface="Calibri" pitchFamily="34" charset="-120"/>
+              </a:rPr>
+              <a:t>
 Signature: the pericentral / periportal zonation genes.</a:t>
             </a:r>
             <a:endParaRPr lang="en-US" sz="1350" dirty="0"/>
@@ -8095,6 +8090,41 @@
           <a:bodyPr wrap="square" lIns="25400" tIns="25400" rIns="25400" bIns="25400" rtlCol="0" anchor="t"/>
           <a:lstStyle/>
           <a:p>
+            <a:pPr marL="0" indent="0" algn="ctr">
+              <a:lnSpc>
+                <a:spcPct val="106000"/>
+              </a:lnSpc>
+              <a:buNone/>
+            </a:pPr>
+            <a:r>
+              <a:rPr lang="en-US" sz="2400" b="1" dirty="0">
+                <a:solidFill>
+                  <a:srgbClr val="1F2733"/>
+                </a:solidFill>
+                <a:latin typeface="Calibri" pitchFamily="34" charset="0"/>
+                <a:ea typeface="Calibri" pitchFamily="34" charset="-122"/>
+                <a:cs typeface="Calibri" pitchFamily="34" charset="-120"/>
+              </a:rPr>
+              <a:t>Loses its CELL-TYPE identity </a:t>
+            </a:r>
+          </a:p>
+          <a:p>
+            <a:pPr marL="0" indent="0" algn="ctr">
+              <a:lnSpc>
+                <a:spcPct val="106000"/>
+              </a:lnSpc>
+              <a:buNone/>
+            </a:pPr>
+            <a:endParaRPr lang="en-US" sz="1350" dirty="0">
+              <a:solidFill>
+                <a:srgbClr val="1F2733"/>
+              </a:solidFill>
+              <a:latin typeface="Calibri" pitchFamily="34" charset="0"/>
+              <a:ea typeface="Calibri" pitchFamily="34" charset="-122"/>
+              <a:cs typeface="Calibri" pitchFamily="34" charset="-120"/>
+            </a:endParaRPr>
+          </a:p>
+          <a:p>
             <a:pPr marL="0" indent="0" algn="l">
               <a:lnSpc>
                 <a:spcPct val="106000"/>
@@ -8110,8 +8140,43 @@
                 <a:ea typeface="Calibri" pitchFamily="34" charset="-122"/>
                 <a:cs typeface="Calibri" pitchFamily="34" charset="-120"/>
               </a:rPr>
-              <a:t>Loses its CELL-TYPE identity (hepatocyte → bile-duct).
-Co-expresses hepatocyte + duct programs (ALB + KRT7).
+              <a:t>hepatocyte → bile-duct
+Co-expresses hepatocyte + duct programs (ALB + KRT7).</a:t>
+            </a:r>
+          </a:p>
+          <a:p>
+            <a:pPr marL="0" indent="0" algn="l">
+              <a:lnSpc>
+                <a:spcPct val="106000"/>
+              </a:lnSpc>
+              <a:buNone/>
+            </a:pPr>
+            <a:endParaRPr lang="en-US" sz="1350" dirty="0">
+              <a:solidFill>
+                <a:srgbClr val="1F2733"/>
+              </a:solidFill>
+              <a:latin typeface="Calibri" pitchFamily="34" charset="0"/>
+              <a:ea typeface="Calibri" pitchFamily="34" charset="-122"/>
+              <a:cs typeface="Calibri" pitchFamily="34" charset="-120"/>
+            </a:endParaRPr>
+          </a:p>
+          <a:p>
+            <a:pPr marL="0" indent="0" algn="l">
+              <a:lnSpc>
+                <a:spcPct val="106000"/>
+              </a:lnSpc>
+              <a:buNone/>
+            </a:pPr>
+            <a:r>
+              <a:rPr lang="en-US" sz="1350" dirty="0">
+                <a:solidFill>
+                  <a:srgbClr val="1F2733"/>
+                </a:solidFill>
+                <a:latin typeface="Calibri" pitchFamily="34" charset="0"/>
+                <a:ea typeface="Calibri" pitchFamily="34" charset="-122"/>
+                <a:cs typeface="Calibri" pitchFamily="34" charset="-120"/>
+              </a:rPr>
+              <a:t>
 Signature: KRT7, KRT19, SOX9 … (from Paper 1).</a:t>
             </a:r>
             <a:endParaRPr lang="en-US" sz="1350" dirty="0"/>
@@ -8180,7 +8245,7 @@
               <a:buNone/>
             </a:pPr>
             <a:r>
-              <a:rPr lang="en-US" sz="1350" b="1" dirty="0">
+              <a:rPr lang="en-US" b="1" dirty="0">
                 <a:solidFill>
                   <a:srgbClr val="0E3A40"/>
                 </a:solidFill>
@@ -8191,7 +8256,7 @@
               <a:t>Analogy:  </a:t>
             </a:r>
             <a:r>
-              <a:rPr lang="en-US" sz="1350" dirty="0">
+              <a:rPr lang="en-US" dirty="0">
                 <a:solidFill>
                   <a:srgbClr val="1F2733"/>
                 </a:solidFill>
@@ -8202,7 +8267,7 @@
               <a:t>a worker who forgets which station they man (de-zonation) is still a factory worker; one who forgets they work in the factory at all (plasticity) is something else.  </a:t>
             </a:r>
             <a:r>
-              <a:rPr lang="en-US" sz="1350" b="1" dirty="0">
+              <a:rPr lang="en-US" b="1" dirty="0">
                 <a:solidFill>
                   <a:srgbClr val="0E3A40"/>
                 </a:solidFill>
@@ -8212,7 +8277,7 @@
               </a:rPr>
               <a:t>H3 asks whether these are the same cells — does losing your address predict losing your job?</a:t>
             </a:r>
-            <a:endParaRPr lang="en-US" sz="1350" dirty="0"/>
+            <a:endParaRPr lang="en-US" dirty="0"/>
           </a:p>
         </p:txBody>
       </p:sp>
@@ -11208,7 +11273,7 @@
               <a:buNone/>
             </a:pPr>
             <a:r>
-              <a:rPr lang="en-US" sz="1500" b="1" dirty="0">
+              <a:rPr lang="en-US" sz="2000" b="1" dirty="0">
                 <a:solidFill>
                   <a:srgbClr val="C05621"/>
                 </a:solidFill>
@@ -11219,7 +11284,7 @@
               <a:t>Negative control.  </a:t>
             </a:r>
             <a:r>
-              <a:rPr lang="en-US" sz="1350" dirty="0">
+              <a:rPr lang="en-US" dirty="0">
                 <a:solidFill>
                   <a:srgbClr val="1F2733"/>
                 </a:solidFill>
@@ -11229,7 +11294,7 @@
               </a:rPr>
               <a:t>Shuffle the disease-stage labels and re-run: the collapse trend must VANISH. A 'signal' that survives shuffling was an artefact. (The positive control — recovering zonation in healthy liver — is the next slide.)</a:t>
             </a:r>
-            <a:endParaRPr lang="en-US" sz="1500" dirty="0"/>
+            <a:endParaRPr lang="en-US" sz="2000" dirty="0"/>
           </a:p>
         </p:txBody>
       </p:sp>
@@ -11261,7 +11326,7 @@
               <a:buNone/>
             </a:pPr>
             <a:r>
-              <a:rPr lang="en-US" sz="1500" b="1" dirty="0">
+              <a:rPr lang="en-US" sz="2000" b="1" dirty="0">
                 <a:solidFill>
                   <a:srgbClr val="0E3A40"/>
                 </a:solidFill>
@@ -11271,7 +11336,7 @@
               </a:rPr>
               <a:t>What de-zonation is — and isn't</a:t>
             </a:r>
-            <a:endParaRPr lang="en-US" sz="1500" dirty="0"/>
+            <a:endParaRPr lang="en-US" sz="2000" dirty="0"/>
           </a:p>
         </p:txBody>
       </p:sp>
@@ -11303,7 +11368,7 @@
               <a:buNone/>
             </a:pPr>
             <a:r>
-              <a:rPr lang="en-US" sz="1350" b="1" dirty="0">
+              <a:rPr lang="en-US" sz="1600" b="1" dirty="0">
                 <a:solidFill>
                   <a:srgbClr val="2F855A"/>
                 </a:solidFill>
@@ -11314,7 +11379,7 @@
               <a:t>IS  </a:t>
             </a:r>
             <a:r>
-              <a:rPr lang="en-US" sz="1350" dirty="0">
+              <a:rPr lang="en-US" sz="1600" dirty="0">
                 <a:solidFill>
                   <a:srgbClr val="1F2733"/>
                 </a:solidFill>
@@ -11324,8 +11389,16 @@
               </a:rPr>
               <a:t>— loss of the expression program: pericentral–periportal mutual exclusivity weakens and the coordinate spread narrows.</a:t>
             </a:r>
-            <a:r>
-              <a:rPr lang="en-US" sz="600" dirty="0">
+          </a:p>
+          <a:p>
+            <a:pPr marL="0" indent="0" algn="l">
+              <a:lnSpc>
+                <a:spcPct val="110000"/>
+              </a:lnSpc>
+              <a:buNone/>
+            </a:pPr>
+            <a:r>
+              <a:rPr lang="en-US" sz="500" dirty="0">
                 <a:solidFill>
                   <a:srgbClr val="000000"/>
                 </a:solidFill>
@@ -11337,7 +11410,7 @@
 </a:t>
             </a:r>
             <a:r>
-              <a:rPr lang="en-US" sz="1350" b="1" dirty="0">
+              <a:rPr lang="en-US" sz="1600" b="1" dirty="0">
                 <a:solidFill>
                   <a:srgbClr val="C05621"/>
                 </a:solidFill>
@@ -11348,7 +11421,7 @@
               <a:t>ISN'T  </a:t>
             </a:r>
             <a:r>
-              <a:rPr lang="en-US" sz="1350" dirty="0">
+              <a:rPr lang="en-US" sz="1600" dirty="0">
                 <a:solidFill>
                   <a:srgbClr val="1F2733"/>
                 </a:solidFill>
@@ -11358,7 +11431,7 @@
               </a:rPr>
               <a:t>— physical spatial scrambling with intact expression: dissociated data couldn't see it, and it's very unlikely here.</a:t>
             </a:r>
-            <a:endParaRPr lang="en-US" sz="1350" dirty="0"/>
+            <a:endParaRPr lang="en-US" sz="1200" dirty="0"/>
           </a:p>
         </p:txBody>
       </p:sp>
@@ -11377,8 +11450,8 @@
         </p:blipFill>
         <p:spPr>
           <a:xfrm>
-            <a:off x="7178040" y="2788920"/>
-            <a:ext cx="4526280" cy="2331720"/>
+            <a:off x="7297947" y="2788920"/>
+            <a:ext cx="4406373" cy="2240280"/>
           </a:xfrm>
           <a:prstGeom prst="rect">
             <a:avLst/>
@@ -11437,15 +11510,7 @@
 
 <file path=ppt/slides/slide8.xml><?xml version="1.0" encoding="utf-8"?>
 <p:sld xmlns:a="http://schemas.openxmlformats.org/drawingml/2006/main" xmlns:r="http://schemas.openxmlformats.org/officeDocument/2006/relationships" xmlns:p="http://schemas.openxmlformats.org/presentationml/2006/main">
-  <p:cSld name="Slide 8">
-    <p:bg>
-      <p:bgPr>
-        <a:solidFill>
-          <a:srgbClr val="FFFFFF"/>
-        </a:solidFill>
-        <a:effectLst/>
-      </p:bgPr>
-    </p:bg>
+  <p:cSld>
     <p:spTree>
       <p:nvGrpSpPr>
         <p:cNvPr id="1" name=""/>
@@ -11462,7 +11527,7 @@
       </p:grpSpPr>
       <p:sp>
         <p:nvSpPr>
-          <p:cNvPr id="2" name="Shape 0"/>
+          <p:cNvPr id="2" name="Rectangle 1"/>
           <p:cNvSpPr/>
           <p:nvPr/>
         </p:nvSpPr>
@@ -11477,19 +11542,37 @@
           <a:solidFill>
             <a:srgbClr val="0E3A40"/>
           </a:solidFill>
-          <a:ln/>
-        </p:spPr>
-        <p:txBody>
-          <a:bodyPr/>
-          <a:lstStyle/>
-          <a:p>
-            <a:endParaRPr lang="en-US"/>
-          </a:p>
-        </p:txBody>
-      </p:sp>
-      <p:sp>
-        <p:nvSpPr>
-          <p:cNvPr id="3" name="Shape 1"/>
+          <a:ln>
+            <a:noFill/>
+          </a:ln>
+          <a:effectLst/>
+        </p:spPr>
+        <p:style>
+          <a:lnRef idx="1">
+            <a:schemeClr val="accent1"/>
+          </a:lnRef>
+          <a:fillRef idx="3">
+            <a:schemeClr val="accent1"/>
+          </a:fillRef>
+          <a:effectRef idx="2">
+            <a:schemeClr val="accent1"/>
+          </a:effectRef>
+          <a:fontRef idx="minor">
+            <a:schemeClr val="lt1"/>
+          </a:fontRef>
+        </p:style>
+        <p:txBody>
+          <a:bodyPr rtlCol="0" anchor="ctr"/>
+          <a:lstStyle/>
+          <a:p>
+            <a:pPr algn="ctr"/>
+            <a:endParaRPr/>
+          </a:p>
+        </p:txBody>
+      </p:sp>
+      <p:sp>
+        <p:nvSpPr>
+          <p:cNvPr id="3" name="Rectangle 2"/>
           <p:cNvSpPr/>
           <p:nvPr/>
         </p:nvSpPr>
@@ -11504,20 +11587,38 @@
           <a:solidFill>
             <a:srgbClr val="C05621"/>
           </a:solidFill>
-          <a:ln/>
-        </p:spPr>
-        <p:txBody>
-          <a:bodyPr/>
-          <a:lstStyle/>
-          <a:p>
-            <a:endParaRPr lang="en-US"/>
-          </a:p>
-        </p:txBody>
-      </p:sp>
-      <p:sp>
-        <p:nvSpPr>
-          <p:cNvPr id="4" name="Text 2"/>
-          <p:cNvSpPr/>
+          <a:ln>
+            <a:noFill/>
+          </a:ln>
+          <a:effectLst/>
+        </p:spPr>
+        <p:style>
+          <a:lnRef idx="1">
+            <a:schemeClr val="accent1"/>
+          </a:lnRef>
+          <a:fillRef idx="3">
+            <a:schemeClr val="accent1"/>
+          </a:fillRef>
+          <a:effectRef idx="2">
+            <a:schemeClr val="accent1"/>
+          </a:effectRef>
+          <a:fontRef idx="minor">
+            <a:schemeClr val="lt1"/>
+          </a:fontRef>
+        </p:style>
+        <p:txBody>
+          <a:bodyPr rtlCol="0" anchor="ctr"/>
+          <a:lstStyle/>
+          <a:p>
+            <a:pPr algn="ctr"/>
+            <a:endParaRPr/>
+          </a:p>
+        </p:txBody>
+      </p:sp>
+      <p:sp>
+        <p:nvSpPr>
+          <p:cNvPr id="4" name="TextBox 3"/>
+          <p:cNvSpPr txBox="1"/>
           <p:nvPr/>
         </p:nvSpPr>
         <p:spPr>
@@ -11529,163 +11630,87 @@
             <a:avLst/>
           </a:prstGeom>
           <a:noFill/>
-          <a:ln/>
-        </p:spPr>
-        <p:txBody>
-          <a:bodyPr wrap="square" lIns="25400" tIns="25400" rIns="25400" bIns="25400" rtlCol="0" anchor="t"/>
-          <a:lstStyle/>
-          <a:p>
-            <a:pPr marL="0" indent="0" algn="l">
+        </p:spPr>
+        <p:txBody>
+          <a:bodyPr wrap="square" lIns="0" tIns="0" rIns="0" bIns="0" anchor="t">
+            <a:spAutoFit/>
+          </a:bodyPr>
+          <a:lstStyle/>
+          <a:p>
+            <a:pPr algn="l">
               <a:lnSpc>
                 <a:spcPct val="100000"/>
               </a:lnSpc>
-              <a:buNone/>
-            </a:pPr>
-            <a:r>
-              <a:rPr lang="en-US" sz="1100" b="1" kern="0" spc="300" dirty="0">
+            </a:pPr>
+            <a:r>
+              <a:rPr sz="1100" b="1" i="0">
                 <a:solidFill>
                   <a:srgbClr val="CFE6E9"/>
                 </a:solidFill>
-                <a:latin typeface="Calibri" pitchFamily="34" charset="0"/>
-                <a:ea typeface="Calibri" pitchFamily="34" charset="-122"/>
-                <a:cs typeface="Calibri" pitchFamily="34" charset="-120"/>
-              </a:rPr>
-              <a:t>POSITIVE CONTROL</a:t>
-            </a:r>
-            <a:endParaRPr lang="en-US" sz="1100" dirty="0"/>
-          </a:p>
-        </p:txBody>
-      </p:sp>
-      <p:sp>
-        <p:nvSpPr>
-          <p:cNvPr id="5" name="Text 3"/>
-          <p:cNvSpPr/>
+                <a:latin typeface="Calibri"/>
+              </a:rPr>
+              <a:t>  VALIDATION</a:t>
+            </a:r>
+          </a:p>
+        </p:txBody>
+      </p:sp>
+      <p:sp>
+        <p:nvSpPr>
+          <p:cNvPr id="5" name="TextBox 4"/>
+          <p:cNvSpPr txBox="1"/>
           <p:nvPr/>
         </p:nvSpPr>
         <p:spPr>
           <a:xfrm>
             <a:off x="502920" y="493776"/>
-            <a:ext cx="10058400" cy="566928"/>
+            <a:ext cx="10515600" cy="566928"/>
           </a:xfrm>
           <a:prstGeom prst="rect">
             <a:avLst/>
           </a:prstGeom>
           <a:noFill/>
-          <a:ln/>
-        </p:spPr>
-        <p:txBody>
-          <a:bodyPr wrap="square" lIns="25400" tIns="25400" rIns="25400" bIns="25400" rtlCol="0" anchor="ctr"/>
-          <a:lstStyle/>
-          <a:p>
-            <a:pPr marL="0" indent="0" algn="l">
+        </p:spPr>
+        <p:txBody>
+          <a:bodyPr wrap="square" lIns="0" tIns="0" rIns="0" bIns="0" anchor="ctr">
+            <a:spAutoFit/>
+          </a:bodyPr>
+          <a:lstStyle/>
+          <a:p>
+            <a:pPr algn="l">
               <a:lnSpc>
                 <a:spcPct val="100000"/>
               </a:lnSpc>
-              <a:buNone/>
-            </a:pPr>
-            <a:r>
-              <a:rPr lang="en-US" sz="2500" b="1" dirty="0">
+            </a:pPr>
+            <a:r>
+              <a:rPr sz="2500" b="1" i="0" dirty="0">
                 <a:solidFill>
                   <a:srgbClr val="FFFFFF"/>
                 </a:solidFill>
-                <a:latin typeface="Georgia" pitchFamily="34" charset="0"/>
-                <a:ea typeface="Georgia" pitchFamily="34" charset="-122"/>
-                <a:cs typeface="Georgia" pitchFamily="34" charset="-120"/>
-              </a:rPr>
-              <a:t>The ruler works on healthy liver</a:t>
-            </a:r>
-            <a:endParaRPr lang="en-US" sz="2500" dirty="0"/>
-          </a:p>
-        </p:txBody>
-      </p:sp>
-      <p:sp>
-        <p:nvSpPr>
-          <p:cNvPr id="6" name="Shape 4"/>
-          <p:cNvSpPr/>
-          <p:nvPr/>
-        </p:nvSpPr>
-        <p:spPr>
-          <a:xfrm>
-            <a:off x="8869680" y="329184"/>
-            <a:ext cx="2788920" cy="420624"/>
-          </a:xfrm>
-          <a:prstGeom prst="roundRect">
-            <a:avLst>
-              <a:gd name="adj" fmla="val 50000"/>
-            </a:avLst>
-          </a:prstGeom>
-          <a:solidFill>
-            <a:srgbClr val="2F855A"/>
-          </a:solidFill>
-          <a:ln/>
-        </p:spPr>
-        <p:txBody>
-          <a:bodyPr/>
-          <a:lstStyle/>
-          <a:p>
-            <a:endParaRPr lang="en-US"/>
-          </a:p>
-        </p:txBody>
-      </p:sp>
-      <p:sp>
-        <p:nvSpPr>
-          <p:cNvPr id="7" name="Text 5"/>
-          <p:cNvSpPr/>
-          <p:nvPr/>
-        </p:nvSpPr>
-        <p:spPr>
-          <a:xfrm>
-            <a:off x="8869680" y="329184"/>
-            <a:ext cx="2788920" cy="420624"/>
-          </a:xfrm>
-          <a:prstGeom prst="rect">
-            <a:avLst/>
-          </a:prstGeom>
-          <a:noFill/>
-          <a:ln/>
-        </p:spPr>
-        <p:txBody>
-          <a:bodyPr wrap="square" lIns="0" tIns="0" rIns="0" bIns="0" rtlCol="0" anchor="ctr"/>
-          <a:lstStyle/>
-          <a:p>
-            <a:pPr marL="0" indent="0" algn="ctr">
-              <a:lnSpc>
-                <a:spcPct val="100000"/>
-              </a:lnSpc>
-              <a:buNone/>
-            </a:pPr>
-            <a:r>
-              <a:rPr lang="en-US" sz="1100" b="1" dirty="0">
-                <a:solidFill>
-                  <a:srgbClr val="FFFFFF"/>
-                </a:solidFill>
-                <a:latin typeface="Calibri" pitchFamily="34" charset="0"/>
-                <a:ea typeface="Calibri" pitchFamily="34" charset="-122"/>
-                <a:cs typeface="Calibri" pitchFamily="34" charset="-120"/>
-              </a:rPr>
-              <a:t>✓ DONE — REAL DATA</a:t>
-            </a:r>
-            <a:endParaRPr lang="en-US" sz="1100" dirty="0"/>
+                <a:latin typeface="Georgia"/>
+              </a:rPr>
+              <a:t>Controls — does the result hold up?</a:t>
+            </a:r>
           </a:p>
         </p:txBody>
       </p:sp>
       <p:pic>
         <p:nvPicPr>
-          <p:cNvPr id="8" name="Image 0" descr="/sessions/hopeful-blissful-volta/mnt/Genomics/Hackathon/presentation/assets/p2_validation.png"/>
+          <p:cNvPr id="6" name="Picture 5" descr="p2_validation.png"/>
           <p:cNvPicPr>
             <a:picLocks noChangeAspect="1"/>
           </p:cNvPicPr>
           <p:nvPr/>
         </p:nvPicPr>
         <p:blipFill>
-          <a:blip r:embed="rId3"/>
-          <a:srcRect/>
-          <a:stretch/>
+          <a:blip r:embed="rId2"/>
+          <a:stretch>
+            <a:fillRect/>
+          </a:stretch>
         </p:blipFill>
         <p:spPr>
           <a:xfrm>
-            <a:off x="640080" y="1554480"/>
-            <a:ext cx="10972800" cy="3429000"/>
+            <a:off x="1051560" y="1325880"/>
+            <a:ext cx="10058400" cy="2785403"/>
           </a:xfrm>
           <a:prstGeom prst="rect">
             <a:avLst/>
@@ -11694,96 +11719,97 @@
       </p:pic>
       <p:sp>
         <p:nvSpPr>
-          <p:cNvPr id="9" name="Text 6"/>
-          <p:cNvSpPr/>
-          <p:nvPr/>
-        </p:nvSpPr>
-        <p:spPr>
-          <a:xfrm>
-            <a:off x="640080" y="5120640"/>
-            <a:ext cx="10972800" cy="457200"/>
+          <p:cNvPr id="7" name="TextBox 6"/>
+          <p:cNvSpPr txBox="1"/>
+          <p:nvPr/>
+        </p:nvSpPr>
+        <p:spPr>
+          <a:xfrm>
+            <a:off x="640080" y="4343400"/>
+            <a:ext cx="10972800" cy="569900"/>
           </a:xfrm>
           <a:prstGeom prst="rect">
             <a:avLst/>
           </a:prstGeom>
           <a:noFill/>
-          <a:ln/>
-        </p:spPr>
-        <p:txBody>
-          <a:bodyPr wrap="square" lIns="25400" tIns="25400" rIns="25400" bIns="25400" rtlCol="0" anchor="t"/>
-          <a:lstStyle/>
-          <a:p>
-            <a:pPr marL="0" indent="0" algn="l">
-              <a:lnSpc>
-                <a:spcPct val="100000"/>
-              </a:lnSpc>
-              <a:buNone/>
-            </a:pPr>
-            <a:r>
-              <a:rPr lang="en-US" sz="2000" b="1" dirty="0">
-                <a:solidFill>
-                  <a:srgbClr val="0E3A40"/>
-                </a:solidFill>
-                <a:latin typeface="Calibri" pitchFamily="34" charset="0"/>
-                <a:ea typeface="Calibri" pitchFamily="34" charset="-122"/>
-                <a:cs typeface="Calibri" pitchFamily="34" charset="-120"/>
-              </a:rPr>
-              <a:t>On real Paper 2 healthy hepatocytes score recovers zonation:  </a:t>
-            </a:r>
-            <a:r>
-              <a:rPr lang="en-US" sz="2000" dirty="0">
+        </p:spPr>
+        <p:txBody>
+          <a:bodyPr wrap="square" lIns="0" tIns="0" rIns="0" bIns="0" anchor="t">
+            <a:spAutoFit/>
+          </a:bodyPr>
+          <a:lstStyle/>
+          <a:p>
+            <a:pPr algn="l">
+              <a:lnSpc>
+                <a:spcPct val="105000"/>
+              </a:lnSpc>
+            </a:pPr>
+            <a:r>
+              <a:rPr b="1" i="0" dirty="0">
+                <a:solidFill>
+                  <a:srgbClr val="2F855A"/>
+                </a:solidFill>
+                <a:latin typeface="Calibri"/>
+              </a:rPr>
+              <a:t>✓  Positive control —  </a:t>
+            </a:r>
+            <a:r>
+              <a:rPr b="0" i="0" dirty="0">
                 <a:solidFill>
                   <a:srgbClr val="1F2733"/>
                 </a:solidFill>
-                <a:latin typeface="Calibri" pitchFamily="34" charset="0"/>
-                <a:ea typeface="Calibri" pitchFamily="34" charset="-122"/>
-                <a:cs typeface="Calibri" pitchFamily="34" charset="-120"/>
-              </a:rPr>
-              <a:t>pericentral CYP2E1 rises with it and periportal ASS1 falls.</a:t>
-            </a:r>
-            <a:endParaRPr lang="en-US" sz="2000" dirty="0"/>
-          </a:p>
-        </p:txBody>
-      </p:sp>
-      <p:sp>
-        <p:nvSpPr>
-          <p:cNvPr id="10" name="Text 7"/>
-          <p:cNvSpPr/>
-          <p:nvPr/>
-        </p:nvSpPr>
-        <p:spPr>
-          <a:xfrm>
-            <a:off x="640080" y="6163056"/>
-            <a:ext cx="10972800" cy="731520"/>
+                <a:latin typeface="Calibri"/>
+              </a:rPr>
+              <a:t>on healthy liver the coordinate recovers zonation: pericentral CYP2E1 rises with it, periportal ASS1 falls (real data, above).</a:t>
+            </a:r>
+          </a:p>
+        </p:txBody>
+      </p:sp>
+      <p:sp>
+        <p:nvSpPr>
+          <p:cNvPr id="9" name="TextBox 8"/>
+          <p:cNvSpPr txBox="1"/>
+          <p:nvPr/>
+        </p:nvSpPr>
+        <p:spPr>
+          <a:xfrm>
+            <a:off x="640080" y="5255863"/>
+            <a:ext cx="10515600" cy="569900"/>
           </a:xfrm>
           <a:prstGeom prst="rect">
             <a:avLst/>
           </a:prstGeom>
           <a:noFill/>
-          <a:ln/>
-        </p:spPr>
-        <p:txBody>
-          <a:bodyPr wrap="square" lIns="25400" tIns="25400" rIns="25400" bIns="25400" rtlCol="0" anchor="t"/>
-          <a:lstStyle/>
-          <a:p>
-            <a:pPr marL="0" indent="0" algn="l">
+        </p:spPr>
+        <p:txBody>
+          <a:bodyPr wrap="square" lIns="0" tIns="0" rIns="0" bIns="0" anchor="ctr">
+            <a:spAutoFit/>
+          </a:bodyPr>
+          <a:lstStyle/>
+          <a:p>
+            <a:pPr algn="l">
               <a:lnSpc>
                 <a:spcPct val="105000"/>
               </a:lnSpc>
-              <a:buNone/>
-            </a:pPr>
-            <a:r>
-              <a:rPr lang="en-US" sz="1250" i="1" dirty="0">
-                <a:solidFill>
-                  <a:srgbClr val="5A6472"/>
-                </a:solidFill>
-                <a:latin typeface="Calibri" pitchFamily="34" charset="0"/>
-                <a:ea typeface="Calibri" pitchFamily="34" charset="-122"/>
-                <a:cs typeface="Calibri" pitchFamily="34" charset="-120"/>
-              </a:rPr>
-              <a:t>A single broad central hump is exactly what a continuum looks like — the proof of zonation is the marker slopes, not two peaks. We validated before trusting it on disease.</a:t>
-            </a:r>
-            <a:endParaRPr lang="en-US" sz="1250" dirty="0"/>
+            </a:pPr>
+            <a:r>
+              <a:rPr b="1" i="0" dirty="0">
+                <a:solidFill>
+                  <a:srgbClr val="C05621"/>
+                </a:solidFill>
+                <a:latin typeface="Calibri"/>
+              </a:rPr>
+              <a:t>✗  Negative control —  </a:t>
+            </a:r>
+            <a:r>
+              <a:rPr b="0" i="0" dirty="0">
+                <a:solidFill>
+                  <a:srgbClr val="1F2733"/>
+                </a:solidFill>
+                <a:latin typeface="Calibri"/>
+              </a:rPr>
+              <a:t>shuffle the disease-stage labels and re-run: the collapse trend must VANISH. A 'signal' that survives shuffling is an artefact, not biology.</a:t>
+            </a:r>
           </a:p>
         </p:txBody>
       </p:sp>
